--- a/report/113598101_SSRE_report.pptx
+++ b/report/113598101_SSRE_report.pptx
@@ -6031,6 +6031,7 @@
               </a:defRPr>
             </a:pPr>
             <a:r>
+              <a:rPr dirty="0"/>
               <a:t>Test Suite Execution</a:t>
             </a:r>
           </a:p>
@@ -6044,8 +6045,8 @@
         </p:nvSpPr>
         <p:spPr>
           <a:xfrm>
-            <a:off x="457200" y="1554480"/>
-            <a:ext cx="4572000" cy="457200"/>
+            <a:off x="457200" y="1629190"/>
+            <a:ext cx="3068537" cy="317837"/>
           </a:xfrm>
           <a:prstGeom prst="roundRect">
             <a:avLst/>
@@ -6113,8 +6114,12 @@
               </a:defRPr>
             </a:pPr>
             <a:r>
+              <a:rPr b="1" dirty="0"/>
+              <a:t>python</a:t>
+            </a:r>
+            <a:r>
               <a:rPr dirty="0"/>
-              <a:t>python -m </a:t>
+              <a:t> -m </a:t>
             </a:r>
             <a:r>
               <a:rPr dirty="0" err="1"/>
@@ -8401,7 +8406,7 @@
         <p:spPr>
           <a:xfrm>
             <a:off x="3540807" y="2921168"/>
-            <a:ext cx="5110079" cy="1015663"/>
+            <a:ext cx="5110079" cy="769441"/>
           </a:xfrm>
           <a:prstGeom prst="rect">
             <a:avLst/>
@@ -8422,14 +8427,14 @@
               </a:defRPr>
             </a:pPr>
             <a:r>
-              <a:rPr lang="en-US" altLang="zh-TW" sz="6000" dirty="0"/>
+              <a:rPr lang="en-US" altLang="zh-TW" sz="4400" dirty="0"/>
               <a:t>Thank You !</a:t>
             </a:r>
             <a:r>
-              <a:rPr lang="zh-TW" altLang="en-US" sz="6000" dirty="0"/>
+              <a:rPr lang="zh-TW" altLang="en-US" sz="4400" dirty="0"/>
               <a:t>🎉</a:t>
             </a:r>
-            <a:endParaRPr sz="6000" dirty="0"/>
+            <a:endParaRPr sz="4400" dirty="0"/>
           </a:p>
         </p:txBody>
       </p:sp>

--- a/report/113598101_SSRE_report.pptx
+++ b/report/113598101_SSRE_report.pptx
@@ -310,7 +310,7 @@
           <a:p>
             <a:fld id="{5BCAD085-E8A6-8845-BD4E-CB4CCA059FC4}" type="datetimeFigureOut">
               <a:rPr lang="en-US" smtClean="0"/>
-              <a:t>11/27/2025</a:t>
+              <a:t>11/28/2025</a:t>
             </a:fld>
             <a:endParaRPr lang="en-US"/>
           </a:p>
@@ -478,7 +478,7 @@
           <a:p>
             <a:fld id="{5BCAD085-E8A6-8845-BD4E-CB4CCA059FC4}" type="datetimeFigureOut">
               <a:rPr lang="en-US" smtClean="0"/>
-              <a:t>11/27/2025</a:t>
+              <a:t>11/28/2025</a:t>
             </a:fld>
             <a:endParaRPr lang="en-US"/>
           </a:p>
@@ -656,7 +656,7 @@
           <a:p>
             <a:fld id="{5BCAD085-E8A6-8845-BD4E-CB4CCA059FC4}" type="datetimeFigureOut">
               <a:rPr lang="en-US" smtClean="0"/>
-              <a:t>11/27/2025</a:t>
+              <a:t>11/28/2025</a:t>
             </a:fld>
             <a:endParaRPr lang="en-US"/>
           </a:p>
@@ -824,7 +824,7 @@
           <a:p>
             <a:fld id="{5BCAD085-E8A6-8845-BD4E-CB4CCA059FC4}" type="datetimeFigureOut">
               <a:rPr lang="en-US" smtClean="0"/>
-              <a:t>11/27/2025</a:t>
+              <a:t>11/28/2025</a:t>
             </a:fld>
             <a:endParaRPr lang="en-US"/>
           </a:p>
@@ -1069,7 +1069,7 @@
           <a:p>
             <a:fld id="{5BCAD085-E8A6-8845-BD4E-CB4CCA059FC4}" type="datetimeFigureOut">
               <a:rPr lang="en-US" smtClean="0"/>
-              <a:t>11/27/2025</a:t>
+              <a:t>11/28/2025</a:t>
             </a:fld>
             <a:endParaRPr lang="en-US"/>
           </a:p>
@@ -1354,7 +1354,7 @@
           <a:p>
             <a:fld id="{5BCAD085-E8A6-8845-BD4E-CB4CCA059FC4}" type="datetimeFigureOut">
               <a:rPr lang="en-US" smtClean="0"/>
-              <a:t>11/27/2025</a:t>
+              <a:t>11/28/2025</a:t>
             </a:fld>
             <a:endParaRPr lang="en-US"/>
           </a:p>
@@ -1773,7 +1773,7 @@
           <a:p>
             <a:fld id="{5BCAD085-E8A6-8845-BD4E-CB4CCA059FC4}" type="datetimeFigureOut">
               <a:rPr lang="en-US" smtClean="0"/>
-              <a:t>11/27/2025</a:t>
+              <a:t>11/28/2025</a:t>
             </a:fld>
             <a:endParaRPr lang="en-US"/>
           </a:p>
@@ -1890,7 +1890,7 @@
           <a:p>
             <a:fld id="{5BCAD085-E8A6-8845-BD4E-CB4CCA059FC4}" type="datetimeFigureOut">
               <a:rPr lang="en-US" smtClean="0"/>
-              <a:t>11/27/2025</a:t>
+              <a:t>11/28/2025</a:t>
             </a:fld>
             <a:endParaRPr lang="en-US"/>
           </a:p>
@@ -1985,7 +1985,7 @@
           <a:p>
             <a:fld id="{5BCAD085-E8A6-8845-BD4E-CB4CCA059FC4}" type="datetimeFigureOut">
               <a:rPr lang="en-US" smtClean="0"/>
-              <a:t>11/27/2025</a:t>
+              <a:t>11/28/2025</a:t>
             </a:fld>
             <a:endParaRPr lang="en-US"/>
           </a:p>
@@ -2260,7 +2260,7 @@
           <a:p>
             <a:fld id="{5BCAD085-E8A6-8845-BD4E-CB4CCA059FC4}" type="datetimeFigureOut">
               <a:rPr lang="en-US" smtClean="0"/>
-              <a:t>11/27/2025</a:t>
+              <a:t>11/28/2025</a:t>
             </a:fld>
             <a:endParaRPr lang="en-US"/>
           </a:p>
@@ -2512,7 +2512,7 @@
           <a:p>
             <a:fld id="{5BCAD085-E8A6-8845-BD4E-CB4CCA059FC4}" type="datetimeFigureOut">
               <a:rPr lang="en-US" smtClean="0"/>
-              <a:t>11/27/2025</a:t>
+              <a:t>11/28/2025</a:t>
             </a:fld>
             <a:endParaRPr lang="en-US"/>
           </a:p>
@@ -2723,7 +2723,7 @@
           <a:p>
             <a:fld id="{5BCAD085-E8A6-8845-BD4E-CB4CCA059FC4}" type="datetimeFigureOut">
               <a:rPr lang="en-US" smtClean="0"/>
-              <a:t>11/27/2025</a:t>
+              <a:t>11/28/2025</a:t>
             </a:fld>
             <a:endParaRPr lang="en-US"/>
           </a:p>
@@ -7974,7 +7974,7 @@
         <p:spPr>
           <a:xfrm>
             <a:off x="457200" y="1554480"/>
-            <a:ext cx="10972800" cy="1261884"/>
+            <a:ext cx="10972800" cy="1384995"/>
           </a:xfrm>
           <a:prstGeom prst="rect">
             <a:avLst/>
@@ -7998,7 +7998,7 @@
               </a:defRPr>
             </a:pPr>
             <a:r>
-              <a:rPr dirty="0"/>
+              <a:rPr sz="1600" dirty="0"/>
               <a:t>▸ Complete secure login and registration system with password hashing and 2FA</a:t>
             </a:r>
           </a:p>
@@ -8014,7 +8014,7 @@
               </a:defRPr>
             </a:pPr>
             <a:r>
-              <a:rPr dirty="0"/>
+              <a:rPr sz="1600" dirty="0"/>
               <a:t>▸ Multi-layer security protection: SQL injection, XSS, brute force prevention</a:t>
             </a:r>
           </a:p>
@@ -8030,7 +8030,7 @@
               </a:defRPr>
             </a:pPr>
             <a:r>
-              <a:rPr dirty="0"/>
+              <a:rPr sz="1600" dirty="0"/>
               <a:t>▸ Comprehensive test framework covering functional and security testing</a:t>
             </a:r>
           </a:p>
@@ -8046,15 +8046,15 @@
               </a:defRPr>
             </a:pPr>
             <a:r>
-              <a:rPr dirty="0"/>
+              <a:rPr sz="1600" dirty="0"/>
               <a:t>▸ GUI implementations (</a:t>
             </a:r>
             <a:r>
-              <a:rPr dirty="0" err="1"/>
+              <a:rPr sz="1600" dirty="0" err="1"/>
               <a:t>Tkinter</a:t>
             </a:r>
             <a:r>
-              <a:rPr dirty="0"/>
+              <a:rPr sz="1600" dirty="0"/>
               <a:t>)</a:t>
             </a:r>
           </a:p>
@@ -8104,7 +8104,7 @@
         <p:spPr>
           <a:xfrm>
             <a:off x="457200" y="3383280"/>
-            <a:ext cx="10972800" cy="1261884"/>
+            <a:ext cx="10972800" cy="1384995"/>
           </a:xfrm>
           <a:prstGeom prst="rect">
             <a:avLst/>
@@ -8128,15 +8128,15 @@
               </a:defRPr>
             </a:pPr>
             <a:r>
-              <a:rPr dirty="0"/>
+              <a:rPr sz="1600" dirty="0"/>
               <a:t>▸</a:t>
             </a:r>
             <a:r>
-              <a:rPr b="1" dirty="0"/>
+              <a:rPr sz="1600" b="1" dirty="0"/>
               <a:t> Secure Coding Practices </a:t>
             </a:r>
             <a:r>
-              <a:rPr dirty="0"/>
+              <a:rPr sz="1600" dirty="0"/>
               <a:t>- Parameterized queries, constant-time comparison, input validation</a:t>
             </a:r>
           </a:p>
@@ -8152,15 +8152,15 @@
               </a:defRPr>
             </a:pPr>
             <a:r>
-              <a:rPr dirty="0"/>
+              <a:rPr sz="1600" dirty="0"/>
               <a:t>▸</a:t>
             </a:r>
             <a:r>
-              <a:rPr b="1" dirty="0"/>
+              <a:rPr sz="1600" b="1" dirty="0"/>
               <a:t> Cryptography Applications </a:t>
             </a:r>
             <a:r>
-              <a:rPr dirty="0"/>
+              <a:rPr sz="1600" dirty="0"/>
               <a:t>- PBKDF2 hashing, salt generation, TOTP implementation</a:t>
             </a:r>
           </a:p>
@@ -8176,15 +8176,15 @@
               </a:defRPr>
             </a:pPr>
             <a:r>
-              <a:rPr dirty="0"/>
+              <a:rPr sz="1600" dirty="0"/>
               <a:t>▸</a:t>
             </a:r>
             <a:r>
-              <a:rPr b="1" dirty="0"/>
+              <a:rPr sz="1600" b="1" dirty="0"/>
               <a:t> Attack Prevention </a:t>
             </a:r>
             <a:r>
-              <a:rPr dirty="0"/>
+              <a:rPr sz="1600" dirty="0"/>
               <a:t>- SQL injection, XSS, timing attack protection mechanisms</a:t>
             </a:r>
           </a:p>
@@ -8200,15 +8200,15 @@
               </a:defRPr>
             </a:pPr>
             <a:r>
-              <a:rPr dirty="0"/>
+              <a:rPr sz="1600" dirty="0"/>
               <a:t>▸</a:t>
             </a:r>
             <a:r>
-              <a:rPr b="1" dirty="0"/>
+              <a:rPr sz="1600" b="1" dirty="0"/>
               <a:t> Test-Driven Development </a:t>
             </a:r>
             <a:r>
-              <a:rPr dirty="0"/>
+              <a:rPr sz="1600" dirty="0"/>
               <a:t>- Unit testing, integration testing, security testing</a:t>
             </a:r>
           </a:p>
@@ -8258,7 +8258,7 @@
         <p:spPr>
           <a:xfrm>
             <a:off x="457200" y="5212080"/>
-            <a:ext cx="10972800" cy="943848"/>
+            <a:ext cx="10972800" cy="1036181"/>
           </a:xfrm>
           <a:prstGeom prst="rect">
             <a:avLst/>
@@ -8282,7 +8282,7 @@
               </a:defRPr>
             </a:pPr>
             <a:r>
-              <a:rPr dirty="0"/>
+              <a:rPr sz="1600" dirty="0"/>
               <a:t>▸ Expand to web application with RESTful API implementation</a:t>
             </a:r>
           </a:p>
@@ -8298,7 +8298,7 @@
               </a:defRPr>
             </a:pPr>
             <a:r>
-              <a:rPr dirty="0"/>
+              <a:rPr sz="1600" dirty="0"/>
               <a:t>▸ Add OAuth 2.0 / OpenID Connect support</a:t>
             </a:r>
           </a:p>
@@ -8314,7 +8314,7 @@
               </a:defRPr>
             </a:pPr>
             <a:r>
-              <a:rPr dirty="0"/>
+              <a:rPr sz="1600" dirty="0"/>
               <a:t>▸ Implement Session management and JWT Token mechanism</a:t>
             </a:r>
           </a:p>
